--- a/decks/maths-speed/maths-speed_ch2_timetables-calendar.pptx
+++ b/decks/maths-speed/maths-speed_ch2_timetables-calendar.pptx
@@ -123,29 +123,29 @@
   <p:extLst>
     <p:ext uri="{521415D9-36F7-43E2-AB2F-B90AF26B5E84}">
       <p14:sectionLst xmlns:p14="http://schemas.microsoft.com/office/powerpoint/2010/main">
-        <p14:section name="Opening" id="{9fb950ec-c074-2664-fb2e-3339b74a2973}">
+        <p14:section name="Opening" id="{731a0939-48f2-2585-de1a-698d7bbccc48}">
           <p14:sldIdLst>
             <p14:sldId id="256"/>
           </p14:sldIdLst>
         </p14:section>
-        <p14:section name="Gate" id="{71431c42-8579-b704-c512-2b762278317e}">
+        <p14:section name="Gate" id="{d4984f03-006f-0a1f-08c9-26cb185b74d8}">
           <p14:sldIdLst>
             <p14:sldId id="257"/>
             <p14:sldId id="258"/>
           </p14:sldIdLst>
         </p14:section>
-        <p14:section name="Pre-teach" id="{a08554d9-11fd-021b-fcfc-d100043aea82}">
+        <p14:section name="Pre-teach" id="{038a0df6-623a-69be-9cfe-908305f1858f}">
           <p14:sldIdLst>
             <p14:sldId id="259"/>
           </p14:sldIdLst>
         </p14:section>
-        <p14:section name="Read-along" id="{a5836422-f9ee-0e0c-55da-159b979bde8c}">
+        <p14:section name="Read-along" id="{a74f3719-5fde-c90a-b293-a7e488da9217}">
           <p14:sldIdLst>
             <p14:sldId id="260"/>
             <p14:sldId id="261"/>
           </p14:sldIdLst>
         </p14:section>
-        <p14:section name="Teach" id="{2d6995ad-c0fb-afc5-29ed-f514313c4a05}">
+        <p14:section name="Teach" id="{218b98b3-f901-374a-ea14-b31c7db542c8}">
           <p14:sldIdLst>
             <p14:sldId id="262"/>
             <p14:sldId id="263"/>
@@ -153,19 +153,19 @@
             <p14:sldId id="265"/>
           </p14:sldIdLst>
         </p14:section>
-        <p14:section name="Routes" id="{50a995d1-fe69-2a44-1aef-5cbb7b33b3d1}">
+        <p14:section name="Routes" id="{80b72c3f-62ff-6b06-e629-dddf6a7a11db}">
           <p14:sldIdLst>
             <p14:sldId id="266"/>
             <p14:sldId id="267"/>
             <p14:sldId id="268"/>
           </p14:sldIdLst>
         </p14:section>
-        <p14:section name="Close" id="{f82cf126-4be9-c5f4-cd85-425a66e69c4a}">
+        <p14:section name="Close" id="{4cc1280c-3451-5e34-286d-6a24f93c4bb3}">
           <p14:sldIdLst>
             <p14:sldId id="269"/>
           </p14:sldIdLst>
         </p14:section>
-        <p14:section name="Answers" id="{3aca615c-4446-cad0-2305-bccb8dac699d}">
+        <p14:section name="Answers" id="{b72d1973-3515-f34e-362f-c402c02a7d4e}">
           <p14:sldIdLst>
             <p14:sldId id="270"/>
             <p14:sldId id="271"/>
@@ -1226,7 +1226,7 @@
             <a:r>
               <a:rPr lang="en-US" dirty="0"/>
               <a:t>Answers — task 2: Find the start time. Reveal the answer; pupils mark their own work in a different colour, then read the "why" together. Same destination for every lane, so one answer serves the whole class.
-Answer: A   15:45
+Answer: D   15:45
 Why: 85 minutes is 1 hour 25 minutes. Back 1 hour from 17:10 is 16:10. Back 10 minutes is 16:00, and back another 15 minutes is 15:45.
 Ask a Support pupil to explain one step, and a Stretch pupil to share their extension.</a:t>
             </a:r>
@@ -1409,7 +1409,7 @@
               <a:rPr lang="en-US" dirty="0"/>
               <a:t>Do now — retrieval. Silent, no notes, no help: recall comes before any support. Give about four minutes.
 1. A bus leaves at 10:47 and arrives at 11:23. How many minutes does the journey take?  →  36 minutes
-2. Which of these is 4:20 pm written on the 24-hour clock?  →  C   16:20
+2. Which of these is 4:20 pm written on the 24-hour clock?  →  D   16:20
 3. There are ___ days in a leap year.  →  366
 Circulate: who gets 3/3 (Stretch route), 2/3 (Core), 0–1 (Support)? Use this to route pupils later in the lesson.</a:t>
             </a:r>
@@ -1501,7 +1501,7 @@
               <a:rPr lang="en-US" dirty="0"/>
               <a:t>Answers — pupils mark their own in a different colour, then hands up for 3/3, 2/3, 1/3.
 1. 36 minutes. From 10:47 to 11:00 is 13 minutes. From 11:00 to 11:23 is 23 minutes. 13 + 23 = 36.
-2. C   16:20. For pm times, add 12 to the hour: 4 + 12 = 16. So 4:20 pm is 16:20.
+2. D   16:20. For pm times, add 12 to the hour: 4 + 12 = 16. So 4:20 pm is 16:20.
 3. 366. A leap year adds one day, 29 February, to the usual 365 days, making 366.
 Say the route each score points to: 3/3 Stretch, 2/3 Core, 0–1 Support. Pupils may choose to move up.</a:t>
             </a:r>
@@ -6531,7 +6531,7 @@
                 <a:ea typeface="Calibri" pitchFamily="34" charset="-122"/>
                 <a:cs typeface="Calibri" pitchFamily="34" charset="-120"/>
               </a:rPr>
-              <a:t>15:45      </a:t>
+              <a:t>16:25      </a:t>
             </a:r>
             <a:pPr algn="ctr" indent="0" marL="0">
               <a:buNone/>
@@ -6559,7 +6559,7 @@
                 <a:ea typeface="Calibri" pitchFamily="34" charset="-122"/>
                 <a:cs typeface="Calibri" pitchFamily="34" charset="-120"/>
               </a:rPr>
-              <a:t>16:25      </a:t>
+              <a:t>16:85      </a:t>
             </a:r>
             <a:pPr algn="ctr" indent="0" marL="0">
               <a:buNone/>
@@ -6615,7 +6615,7 @@
                 <a:ea typeface="Calibri" pitchFamily="34" charset="-122"/>
                 <a:cs typeface="Calibri" pitchFamily="34" charset="-120"/>
               </a:rPr>
-              <a:t>16:85</a:t>
+              <a:t>15:45</a:t>
             </a:r>
             <a:endParaRPr lang="en-US" sz="2000" dirty="0"/>
           </a:p>
@@ -7605,7 +7605,7 @@
                 <a:ea typeface="Calibri" pitchFamily="34" charset="-122"/>
                 <a:cs typeface="Calibri" pitchFamily="34" charset="-120"/>
               </a:rPr>
-              <a:t>Wednesday</a:t>
+              <a:t>Friday</a:t>
             </a:r>
             <a:endParaRPr lang="en-US" sz="2400" dirty="0"/>
           </a:p>
@@ -7679,7 +7679,7 @@
                 <a:ea typeface="Calibri" pitchFamily="34" charset="-122"/>
                 <a:cs typeface="Calibri" pitchFamily="34" charset="-120"/>
               </a:rPr>
-              <a:t>Friday</a:t>
+              <a:t>Saturday</a:t>
             </a:r>
             <a:endParaRPr lang="en-US" sz="2400" dirty="0"/>
           </a:p>
@@ -7716,7 +7716,7 @@
                 <a:ea typeface="Calibri" pitchFamily="34" charset="-122"/>
                 <a:cs typeface="Calibri" pitchFamily="34" charset="-120"/>
               </a:rPr>
-              <a:t>Saturday</a:t>
+              <a:t>Wednesday</a:t>
             </a:r>
             <a:endParaRPr lang="en-US" sz="2400" dirty="0"/>
           </a:p>
@@ -8580,7 +8580,7 @@
                 <a:ea typeface="Cambria" pitchFamily="34" charset="-122"/>
                 <a:cs typeface="Cambria" pitchFamily="34" charset="-120"/>
               </a:rPr>
-              <a:t>A   15:45</a:t>
+              <a:t>D   15:45</a:t>
             </a:r>
             <a:endParaRPr lang="en-US" sz="1800" dirty="0"/>
           </a:p>
@@ -9771,7 +9771,7 @@
                 <a:ea typeface="Calibri" pitchFamily="34" charset="-122"/>
                 <a:cs typeface="Calibri" pitchFamily="34" charset="-120"/>
               </a:rPr>
-              <a:t>04:20</a:t>
+              <a:t>14:20</a:t>
             </a:r>
             <a:endParaRPr lang="en-US" sz="2400" dirty="0"/>
           </a:p>
@@ -9808,7 +9808,7 @@
                 <a:ea typeface="Calibri" pitchFamily="34" charset="-122"/>
                 <a:cs typeface="Calibri" pitchFamily="34" charset="-120"/>
               </a:rPr>
-              <a:t>14:20</a:t>
+              <a:t>04:20</a:t>
             </a:r>
             <a:endParaRPr lang="en-US" sz="2400" dirty="0"/>
           </a:p>
@@ -9845,7 +9845,7 @@
                 <a:ea typeface="Calibri" pitchFamily="34" charset="-122"/>
                 <a:cs typeface="Calibri" pitchFamily="34" charset="-120"/>
               </a:rPr>
-              <a:t>16:20</a:t>
+              <a:t>20:16</a:t>
             </a:r>
             <a:endParaRPr lang="en-US" sz="2400" dirty="0"/>
           </a:p>
@@ -9882,7 +9882,7 @@
                 <a:ea typeface="Calibri" pitchFamily="34" charset="-122"/>
                 <a:cs typeface="Calibri" pitchFamily="34" charset="-120"/>
               </a:rPr>
-              <a:t>20:16</a:t>
+              <a:t>16:20</a:t>
             </a:r>
             <a:endParaRPr lang="en-US" sz="2400" dirty="0"/>
           </a:p>
@@ -10731,7 +10731,7 @@
                 <a:ea typeface="Calibri" pitchFamily="34" charset="-122"/>
                 <a:cs typeface="Calibri" pitchFamily="34" charset="-120"/>
               </a:rPr>
-              <a:t>C   16:20</a:t>
+              <a:t>D   16:20</a:t>
             </a:r>
             <a:endParaRPr lang="en-US" sz="2200" dirty="0"/>
           </a:p>

--- a/decks/maths-speed/maths-speed_ch2_timetables-calendar.pptx
+++ b/decks/maths-speed/maths-speed_ch2_timetables-calendar.pptx
@@ -123,29 +123,29 @@
   <p:extLst>
     <p:ext uri="{521415D9-36F7-43E2-AB2F-B90AF26B5E84}">
       <p14:sectionLst xmlns:p14="http://schemas.microsoft.com/office/powerpoint/2010/main">
-        <p14:section name="Opening" id="{731a0939-48f2-2585-de1a-698d7bbccc48}">
+        <p14:section name="Opening" id="{550fb7ea-4135-ff46-ed56-b1b8dcfbde70}">
           <p14:sldIdLst>
             <p14:sldId id="256"/>
           </p14:sldIdLst>
         </p14:section>
-        <p14:section name="Gate" id="{d4984f03-006f-0a1f-08c9-26cb185b74d8}">
+        <p14:section name="Gate" id="{1bc6b005-5cd3-e7d0-0fc2-08910a027867}">
           <p14:sldIdLst>
             <p14:sldId id="257"/>
             <p14:sldId id="258"/>
           </p14:sldIdLst>
         </p14:section>
-        <p14:section name="Pre-teach" id="{038a0df6-623a-69be-9cfe-908305f1858f}">
+        <p14:section name="Pre-teach" id="{41f10d82-b3fd-cacc-af21-d1f06921b40c}">
           <p14:sldIdLst>
             <p14:sldId id="259"/>
           </p14:sldIdLst>
         </p14:section>
-        <p14:section name="Read-along" id="{a74f3719-5fde-c90a-b293-a7e488da9217}">
+        <p14:section name="Read-along" id="{f747c79e-98b2-3f78-ca76-b64dbee1fa90}">
           <p14:sldIdLst>
             <p14:sldId id="260"/>
             <p14:sldId id="261"/>
           </p14:sldIdLst>
         </p14:section>
-        <p14:section name="Teach" id="{218b98b3-f901-374a-ea14-b31c7db542c8}">
+        <p14:section name="Teach" id="{8148abd8-a714-8fac-49ad-ce5a17425bd1}">
           <p14:sldIdLst>
             <p14:sldId id="262"/>
             <p14:sldId id="263"/>
@@ -153,19 +153,19 @@
             <p14:sldId id="265"/>
           </p14:sldIdLst>
         </p14:section>
-        <p14:section name="Routes" id="{80b72c3f-62ff-6b06-e629-dddf6a7a11db}">
+        <p14:section name="Routes" id="{373f6f14-1f80-197f-2155-9301f0540c38}">
           <p14:sldIdLst>
             <p14:sldId id="266"/>
             <p14:sldId id="267"/>
             <p14:sldId id="268"/>
           </p14:sldIdLst>
         </p14:section>
-        <p14:section name="Close" id="{4cc1280c-3451-5e34-286d-6a24f93c4bb3}">
+        <p14:section name="Close" id="{3bfa16c8-bc90-f6d1-6362-1ba08147e57e}">
           <p14:sldIdLst>
             <p14:sldId id="269"/>
           </p14:sldIdLst>
         </p14:section>
-        <p14:section name="Answers" id="{b72d1973-3515-f34e-362f-c402c02a7d4e}">
+        <p14:section name="Answers" id="{d40dc162-2a08-703f-3e86-c22f0de42494}">
           <p14:sldIdLst>
             <p14:sldId id="270"/>
             <p14:sldId id="271"/>
